--- a/material/feature/202610/文字.pptx
+++ b/material/feature/202610/文字.pptx
@@ -3214,7 +3214,31 @@
                   <a:cs typeface="思源黑体" panose="020B0500000000000000" charset="-122"/>
                   <a:sym typeface="+mn-ea"/>
                 </a:rPr>
-                <a:t>全屏天空盒技术实现</a:t>
+                <a:t>大憨批之</a:t>
+              </a:r>
+              <a:r>
+                <a:rPr lang="en-US" altLang="zh-CN" sz="3600" b="1">
+                  <a:solidFill>
+                    <a:schemeClr val="bg1"/>
+                  </a:solidFill>
+                  <a:latin typeface="思源黑体" panose="020B0500000000000000" charset="-122"/>
+                  <a:ea typeface="思源黑体" panose="020B0500000000000000" charset="-122"/>
+                  <a:cs typeface="思源黑体" panose="020B0500000000000000" charset="-122"/>
+                  <a:sym typeface="+mn-ea"/>
+                </a:rPr>
+                <a:t>mcdoc</a:t>
+              </a:r>
+              <a:r>
+                <a:rPr lang="zh-CN" altLang="en-US" sz="3600" b="1">
+                  <a:solidFill>
+                    <a:schemeClr val="bg1"/>
+                  </a:solidFill>
+                  <a:latin typeface="思源黑体" panose="020B0500000000000000" charset="-122"/>
+                  <a:ea typeface="思源黑体" panose="020B0500000000000000" charset="-122"/>
+                  <a:cs typeface="思源黑体" panose="020B0500000000000000" charset="-122"/>
+                  <a:sym typeface="+mn-ea"/>
+                </a:rPr>
+                <a:t>进阶</a:t>
               </a:r>
               <a:endParaRPr lang="zh-CN" altLang="en-US" sz="3600" b="1">
                 <a:solidFill>
@@ -3264,7 +3288,7 @@
               <a:spAutoFit/>
             </a:bodyPr>
             <a:p>
-              <a:pPr algn="l"/>
+              <a:pPr algn="r"/>
               <a:r>
                 <a:rPr lang="zh-CN" altLang="en-US" sz="2800" b="1">
                   <a:solidFill>
@@ -3273,7 +3297,7 @@
                   <a:latin typeface="思源黑体" panose="020B0500000000000000" charset="-122"/>
                   <a:ea typeface="思源黑体" panose="020B0500000000000000" charset="-122"/>
                 </a:rPr>
-                <a:t>光照贴图生成原理和修改</a:t>
+                <a:t>数值提供器的性能边界</a:t>
               </a:r>
               <a:endParaRPr lang="zh-CN" altLang="en-US" sz="2800" b="1">
                 <a:solidFill>
@@ -3306,7 +3330,7 @@
               <a:spAutoFit/>
             </a:bodyPr>
             <a:p>
-              <a:pPr algn="l"/>
+              <a:pPr algn="r"/>
               <a:r>
                 <a:rPr lang="zh-CN" altLang="en-US" sz="2800" b="1">
                   <a:solidFill>
@@ -3315,7 +3339,7 @@
                   <a:latin typeface="思源黑体" panose="020B0500000000000000" charset="-122"/>
                   <a:ea typeface="思源黑体" panose="020B0500000000000000" charset="-122"/>
                 </a:rPr>
-                <a:t>第一人称视角下自身背饰的隐藏方法</a:t>
+                <a:t>在世界生成方面搞点花活</a:t>
               </a:r>
               <a:endParaRPr lang="zh-CN" altLang="en-US" sz="2800" b="1">
                 <a:solidFill>
@@ -3348,7 +3372,7 @@
               <a:spAutoFit/>
             </a:bodyPr>
             <a:p>
-              <a:pPr algn="l"/>
+              <a:pPr algn="r"/>
               <a:r>
                 <a:rPr lang="zh-CN" altLang="en-US" sz="2800" b="1">
                   <a:solidFill>
@@ -3359,9 +3383,21 @@
                   <a:cs typeface="思源黑体" panose="020B0500000000000000" charset="-122"/>
                   <a:sym typeface="+mn-ea"/>
                 </a:rPr>
-                <a:t>26.3数据包性能实测</a:t>
+                <a:t>运输矿车</a:t>
               </a:r>
-              <a:endParaRPr lang="zh-CN" altLang="en-US" sz="2800" b="1">
+              <a:r>
+                <a:rPr lang="en-US" altLang="zh-CN" sz="2800" b="1">
+                  <a:solidFill>
+                    <a:schemeClr val="bg1"/>
+                  </a:solidFill>
+                  <a:latin typeface="思源黑体" panose="020B0500000000000000" charset="-122"/>
+                  <a:ea typeface="思源黑体" panose="020B0500000000000000" charset="-122"/>
+                  <a:cs typeface="思源黑体" panose="020B0500000000000000" charset="-122"/>
+                  <a:sym typeface="+mn-ea"/>
+                </a:rPr>
+                <a:t>GUI</a:t>
+              </a:r>
+              <a:endParaRPr lang="en-US" altLang="zh-CN" sz="2800" b="1">
                 <a:solidFill>
                   <a:schemeClr val="bg1"/>
                 </a:solidFill>
